--- a/AeroDex_SIH2026_Submission.pptx
+++ b/AeroDex_SIH2026_Submission.pptx
@@ -8397,7 +8397,7 @@
                 </a:solidFill>
                 <a:latin typeface="Segoe UI"/>
               </a:rPr>
-              <a:t>Playwright (Headless Chromium), HTTPX, RFC 9309 RobotGuard, 6-Node Domestic Proxy Pool (IN-West/North/South/East).</a:t>
+              <a:t>Playwright (Headless Chromium), HTTPX, RFC 9309 RobotGuard, 6 Desktop Profiles Header &amp; Fingerprint Rotation (Direct Egress).</a:t>
             </a:r>
           </a:p>
           <a:p>
@@ -8832,7 +8832,7 @@
                 </a:solidFill>
                 <a:latin typeface="Segoe UI"/>
               </a:rPr>
-              <a:t>Ethical Multi-Source Ingestion  </a:t>
+              <a:t>Ethical Multi-Source Ingestion &amp; Direct Links  </a:t>
             </a:r>
             <a:r>
               <a:rPr sz="800" b="1">
@@ -8841,7 +8841,7 @@
                 </a:solidFill>
                 <a:latin typeface="Segoe UI"/>
               </a:rPr>
-              <a:t>• 50 Routes • 14.5k+ Daily Quotes</a:t>
+              <a:t>• 2 Live Scrapers • 10 Deeplinks</a:t>
             </a:r>
           </a:p>
           <a:p>
@@ -8852,7 +8852,7 @@
                 </a:solidFill>
                 <a:latin typeface="Segoe UI"/>
               </a:rPr>
-              <a:t>Concurrently crawls Google Flights, EaseMyTrip, MakeMyTrip, and direct carriers across 50 trunk &amp; regional routes via Playwright. Gated by RFC 9309 robots.txt checks and a 6-node domestic proxy pool.</a:t>
+              <a:t>Active live scraping on Google Flights &amp; EaseMyTrip via Playwright; RFC 9309 ethically gated with 1-click verification deeplinks across 10 OTA &amp; carrier portals with browser fingerprint rotation.</a:t>
             </a:r>
           </a:p>
         </p:txBody>
@@ -9168,7 +9168,7 @@
               </a:defRPr>
             </a:pPr>
             <a:r>
-              <a:t>★ WORKING PROTOTYPE LIVE: http://localhost:8000 • 14,500+ Quotes • 50 Routes • 11/11 Test Suite Pass</a:t>
+              <a:t>★ WORKING PROTOTYPE LIVE: http://localhost:8000 • 14,500+ Quotes • 50 Routes • 31/31 Test Suite Pass</a:t>
             </a:r>
           </a:p>
         </p:txBody>

--- a/AeroDex_SIH2026_Submission.pptx
+++ b/AeroDex_SIH2026_Submission.pptx
@@ -8841,7 +8841,7 @@
                 </a:solidFill>
                 <a:latin typeface="Segoe UI"/>
               </a:rPr>
-              <a:t>• 2 Live Scrapers • 10 Deeplinks</a:t>
+              <a:t>• 4 Live Scrapers • 7 Deeplinks</a:t>
             </a:r>
           </a:p>
           <a:p>
@@ -8852,7 +8852,7 @@
                 </a:solidFill>
                 <a:latin typeface="Segoe UI"/>
               </a:rPr>
-              <a:t>Active live scraping on Google Flights &amp; EaseMyTrip via Playwright; RFC 9309 ethically gated with 1-click verification deeplinks across 10 OTA &amp; carrier portals with browser fingerprint rotation.</a:t>
+              <a:t>Active live scraping on Google Flights, EaseMyTrip, Cleartrip &amp; SpiceJet via Playwright; 1-click verification deeplinks across remaining 7 OTA &amp; carrier portals with browser fingerprint rotation.</a:t>
             </a:r>
           </a:p>
         </p:txBody>
